--- a/tests/golden/visual/composition/v6_metric_dashboard/deck.pptx
+++ b/tests/golden/visual/composition/v6_metric_dashboard/deck.pptx
@@ -910,7 +910,7 @@
         <p:spPr>
           <a:xfrm>
             <a:off x="640080" y="411480"/>
-            <a:ext cx="7863840" cy="457200"/>
+            <a:ext cx="7863840" cy="601218"/>
           </a:xfrm>
           <a:prstGeom prst="rect">
             <a:avLst/>
@@ -948,7 +948,7 @@
         </p:nvSpPr>
         <p:spPr>
           <a:xfrm>
-            <a:off x="640080" y="906780"/>
+            <a:off x="640080" y="1050798"/>
             <a:ext cx="7863840" cy="365760"/>
           </a:xfrm>
           <a:prstGeom prst="rect">
@@ -987,8 +987,8 @@
         </p:nvSpPr>
         <p:spPr>
           <a:xfrm>
-            <a:off x="640080" y="1348740"/>
-            <a:ext cx="2545080" cy="765840"/>
+            <a:off x="640080" y="1492758"/>
+            <a:ext cx="2545080" cy="721195"/>
           </a:xfrm>
           <a:prstGeom prst="rect">
             <a:avLst/>
@@ -1026,8 +1026,8 @@
         </p:nvSpPr>
         <p:spPr>
           <a:xfrm>
-            <a:off x="3299460" y="1348740"/>
-            <a:ext cx="2545080" cy="765840"/>
+            <a:off x="3299460" y="1492758"/>
+            <a:ext cx="2545080" cy="721195"/>
           </a:xfrm>
           <a:prstGeom prst="rect">
             <a:avLst/>
@@ -1065,8 +1065,8 @@
         </p:nvSpPr>
         <p:spPr>
           <a:xfrm>
-            <a:off x="5958840" y="1348740"/>
-            <a:ext cx="2545080" cy="765840"/>
+            <a:off x="5958840" y="1492758"/>
+            <a:ext cx="2545080" cy="721195"/>
           </a:xfrm>
           <a:prstGeom prst="rect">
             <a:avLst/>
@@ -1104,8 +1104,8 @@
         </p:nvSpPr>
         <p:spPr>
           <a:xfrm>
-            <a:off x="640080" y="2228880"/>
-            <a:ext cx="2545080" cy="765840"/>
+            <a:off x="640080" y="2328253"/>
+            <a:ext cx="2545080" cy="721195"/>
           </a:xfrm>
           <a:prstGeom prst="rect">
             <a:avLst/>
@@ -1143,8 +1143,8 @@
         </p:nvSpPr>
         <p:spPr>
           <a:xfrm>
-            <a:off x="3299460" y="2228880"/>
-            <a:ext cx="2545080" cy="765840"/>
+            <a:off x="3299460" y="2328253"/>
+            <a:ext cx="2545080" cy="721195"/>
           </a:xfrm>
           <a:prstGeom prst="rect">
             <a:avLst/>
@@ -1182,8 +1182,8 @@
         </p:nvSpPr>
         <p:spPr>
           <a:xfrm>
-            <a:off x="640080" y="3109021"/>
-            <a:ext cx="7863840" cy="1008827"/>
+            <a:off x="640080" y="3163748"/>
+            <a:ext cx="7863840" cy="954100"/>
           </a:xfrm>
           <a:prstGeom prst="rect">
             <a:avLst/>
@@ -1207,7 +1207,7 @@
         </p:nvSpPr>
         <p:spPr>
           <a:xfrm>
-            <a:off x="640080" y="3476274"/>
+            <a:off x="640080" y="3503638"/>
             <a:ext cx="7863840" cy="274320"/>
           </a:xfrm>
           <a:prstGeom prst="rect">

--- a/tests/golden/visual/composition/v6_metric_dashboard/deck.pptx
+++ b/tests/golden/visual/composition/v6_metric_dashboard/deck.pptx
@@ -1193,7 +1193,7 @@
           </a:solidFill>
           <a:ln w="12700">
             <a:solidFill>
-              <a:srgbClr val="333333"/>
+              <a:srgbClr val="D9D5CF"/>
             </a:solidFill>
             <a:prstDash val="solid"/>
           </a:ln>

--- a/tests/golden/visual/composition/v6_metric_dashboard/deck.pptx
+++ b/tests/golden/visual/composition/v6_metric_dashboard/deck.pptx
@@ -910,7 +910,7 @@
         <p:spPr>
           <a:xfrm>
             <a:off x="640080" y="411480"/>
-            <a:ext cx="7863840" cy="601218"/>
+            <a:ext cx="7863840" cy="621792"/>
           </a:xfrm>
           <a:prstGeom prst="rect">
             <a:avLst/>
@@ -948,7 +948,7 @@
         </p:nvSpPr>
         <p:spPr>
           <a:xfrm>
-            <a:off x="640080" y="1050798"/>
+            <a:off x="640080" y="1071372"/>
             <a:ext cx="7863840" cy="365760"/>
           </a:xfrm>
           <a:prstGeom prst="rect">
@@ -987,8 +987,8 @@
         </p:nvSpPr>
         <p:spPr>
           <a:xfrm>
-            <a:off x="640080" y="1492758"/>
-            <a:ext cx="2545080" cy="721195"/>
+            <a:off x="640080" y="1513332"/>
+            <a:ext cx="2545080" cy="714817"/>
           </a:xfrm>
           <a:prstGeom prst="rect">
             <a:avLst/>
@@ -1026,8 +1026,8 @@
         </p:nvSpPr>
         <p:spPr>
           <a:xfrm>
-            <a:off x="3299460" y="1492758"/>
-            <a:ext cx="2545080" cy="721195"/>
+            <a:off x="3299460" y="1513332"/>
+            <a:ext cx="2545080" cy="714817"/>
           </a:xfrm>
           <a:prstGeom prst="rect">
             <a:avLst/>
@@ -1065,8 +1065,8 @@
         </p:nvSpPr>
         <p:spPr>
           <a:xfrm>
-            <a:off x="5958840" y="1492758"/>
-            <a:ext cx="2545080" cy="721195"/>
+            <a:off x="5958840" y="1513332"/>
+            <a:ext cx="2545080" cy="714817"/>
           </a:xfrm>
           <a:prstGeom prst="rect">
             <a:avLst/>
@@ -1104,8 +1104,8 @@
         </p:nvSpPr>
         <p:spPr>
           <a:xfrm>
-            <a:off x="640080" y="2328253"/>
-            <a:ext cx="2545080" cy="721195"/>
+            <a:off x="640080" y="2342449"/>
+            <a:ext cx="2545080" cy="714817"/>
           </a:xfrm>
           <a:prstGeom prst="rect">
             <a:avLst/>
@@ -1143,8 +1143,8 @@
         </p:nvSpPr>
         <p:spPr>
           <a:xfrm>
-            <a:off x="3299460" y="2328253"/>
-            <a:ext cx="2545080" cy="721195"/>
+            <a:off x="3299460" y="2342449"/>
+            <a:ext cx="2545080" cy="714817"/>
           </a:xfrm>
           <a:prstGeom prst="rect">
             <a:avLst/>
@@ -1182,8 +1182,8 @@
         </p:nvSpPr>
         <p:spPr>
           <a:xfrm>
-            <a:off x="640080" y="3163748"/>
-            <a:ext cx="7863840" cy="954100"/>
+            <a:off x="640080" y="3171566"/>
+            <a:ext cx="7863840" cy="946282"/>
           </a:xfrm>
           <a:prstGeom prst="rect">
             <a:avLst/>
@@ -1207,7 +1207,7 @@
         </p:nvSpPr>
         <p:spPr>
           <a:xfrm>
-            <a:off x="640080" y="3503638"/>
+            <a:off x="640080" y="3507547"/>
             <a:ext cx="7863840" cy="274320"/>
           </a:xfrm>
           <a:prstGeom prst="rect">

--- a/tests/golden/visual/composition/v6_metric_dashboard/deck.pptx
+++ b/tests/golden/visual/composition/v6_metric_dashboard/deck.pptx
@@ -910,7 +910,7 @@
         <p:spPr>
           <a:xfrm>
             <a:off x="640080" y="411480"/>
-            <a:ext cx="7863840" cy="621792"/>
+            <a:ext cx="7863840" cy="601218"/>
           </a:xfrm>
           <a:prstGeom prst="rect">
             <a:avLst/>
@@ -948,7 +948,7 @@
         </p:nvSpPr>
         <p:spPr>
           <a:xfrm>
-            <a:off x="640080" y="1071372"/>
+            <a:off x="640080" y="1050798"/>
             <a:ext cx="7863840" cy="365760"/>
           </a:xfrm>
           <a:prstGeom prst="rect">
@@ -987,8 +987,8 @@
         </p:nvSpPr>
         <p:spPr>
           <a:xfrm>
-            <a:off x="640080" y="1513332"/>
-            <a:ext cx="2545080" cy="714817"/>
+            <a:off x="640080" y="1492758"/>
+            <a:ext cx="2545080" cy="721195"/>
           </a:xfrm>
           <a:prstGeom prst="rect">
             <a:avLst/>
@@ -1026,8 +1026,8 @@
         </p:nvSpPr>
         <p:spPr>
           <a:xfrm>
-            <a:off x="3299460" y="1513332"/>
-            <a:ext cx="2545080" cy="714817"/>
+            <a:off x="3299460" y="1492758"/>
+            <a:ext cx="2545080" cy="721195"/>
           </a:xfrm>
           <a:prstGeom prst="rect">
             <a:avLst/>
@@ -1065,8 +1065,8 @@
         </p:nvSpPr>
         <p:spPr>
           <a:xfrm>
-            <a:off x="5958840" y="1513332"/>
-            <a:ext cx="2545080" cy="714817"/>
+            <a:off x="5958840" y="1492758"/>
+            <a:ext cx="2545080" cy="721195"/>
           </a:xfrm>
           <a:prstGeom prst="rect">
             <a:avLst/>
@@ -1104,8 +1104,8 @@
         </p:nvSpPr>
         <p:spPr>
           <a:xfrm>
-            <a:off x="640080" y="2342449"/>
-            <a:ext cx="2545080" cy="714817"/>
+            <a:off x="640080" y="2328253"/>
+            <a:ext cx="2545080" cy="721195"/>
           </a:xfrm>
           <a:prstGeom prst="rect">
             <a:avLst/>
@@ -1143,8 +1143,8 @@
         </p:nvSpPr>
         <p:spPr>
           <a:xfrm>
-            <a:off x="3299460" y="2342449"/>
-            <a:ext cx="2545080" cy="714817"/>
+            <a:off x="3299460" y="2328253"/>
+            <a:ext cx="2545080" cy="721195"/>
           </a:xfrm>
           <a:prstGeom prst="rect">
             <a:avLst/>
@@ -1182,8 +1182,8 @@
         </p:nvSpPr>
         <p:spPr>
           <a:xfrm>
-            <a:off x="640080" y="3171566"/>
-            <a:ext cx="7863840" cy="946282"/>
+            <a:off x="640080" y="3163748"/>
+            <a:ext cx="7863840" cy="954100"/>
           </a:xfrm>
           <a:prstGeom prst="rect">
             <a:avLst/>
@@ -1207,7 +1207,7 @@
         </p:nvSpPr>
         <p:spPr>
           <a:xfrm>
-            <a:off x="640080" y="3507547"/>
+            <a:off x="640080" y="3503638"/>
             <a:ext cx="7863840" cy="274320"/>
           </a:xfrm>
           <a:prstGeom prst="rect">

--- a/tests/golden/visual/composition/v6_metric_dashboard/deck.pptx
+++ b/tests/golden/visual/composition/v6_metric_dashboard/deck.pptx
@@ -580,7 +580,7 @@
     <p:bg>
       <p:bgPr>
         <a:solidFill>
-          <a:srgbClr val="F7F6F3"/>
+          <a:srgbClr val="D9E2EA"/>
         </a:solidFill>
       </p:bgPr>
     </p:bg>
@@ -909,8 +909,8 @@
         </p:nvSpPr>
         <p:spPr>
           <a:xfrm>
-            <a:off x="640080" y="411480"/>
-            <a:ext cx="7863840" cy="601218"/>
+            <a:off x="502920" y="347472"/>
+            <a:ext cx="8138160" cy="594360"/>
           </a:xfrm>
           <a:prstGeom prst="rect">
             <a:avLst/>
@@ -926,9 +926,9 @@
               <a:buNone/>
             </a:pPr>
             <a:r>
-              <a:rPr lang="en-US" sz="3400" b="1" dirty="0">
+              <a:rPr lang="en-US" sz="2000" b="1" dirty="0">
                 <a:solidFill>
-                  <a:srgbClr val="1A1A1A"/>
+                  <a:srgbClr val="1B3A4B"/>
                 </a:solidFill>
                 <a:latin typeface="Microsoft YaHei" pitchFamily="34" charset="0"/>
                 <a:ea typeface="Microsoft YaHei" pitchFamily="34" charset="-122"/>
@@ -936,7 +936,7 @@
               </a:rPr>
               <a:t>急诊核心运营指标看板</a:t>
             </a:r>
-            <a:endParaRPr lang="en-US" sz="3400" dirty="0"/>
+            <a:endParaRPr lang="en-US" sz="2000" dirty="0"/>
           </a:p>
         </p:txBody>
       </p:sp>
@@ -948,8 +948,8 @@
         </p:nvSpPr>
         <p:spPr>
           <a:xfrm>
-            <a:off x="640080" y="1050798"/>
-            <a:ext cx="7863840" cy="365760"/>
+            <a:off x="502920" y="979932"/>
+            <a:ext cx="8138160" cy="365760"/>
           </a:xfrm>
           <a:prstGeom prst="rect">
             <a:avLst/>
@@ -965,9 +965,9 @@
               <a:buNone/>
             </a:pPr>
             <a:r>
-              <a:rPr lang="en-US" sz="1800" dirty="0">
+              <a:rPr lang="en-US" sz="1400" b="1" dirty="0">
                 <a:solidFill>
-                  <a:srgbClr val="4A4A4A"/>
+                  <a:srgbClr val="1B3A4B"/>
                 </a:solidFill>
                 <a:latin typeface="Microsoft YaHei" pitchFamily="34" charset="0"/>
                 <a:ea typeface="Microsoft YaHei" pitchFamily="34" charset="-122"/>
@@ -975,7 +975,7 @@
               </a:rPr>
               <a:t>候诊压力仍是当前最需优先治理的指标。</a:t>
             </a:r>
-            <a:endParaRPr lang="en-US" sz="1800" dirty="0"/>
+            <a:endParaRPr lang="en-US" sz="1400" dirty="0"/>
           </a:p>
         </p:txBody>
       </p:sp>
@@ -987,8 +987,8 @@
         </p:nvSpPr>
         <p:spPr>
           <a:xfrm>
-            <a:off x="640080" y="1492758"/>
-            <a:ext cx="2545080" cy="721195"/>
+            <a:off x="502920" y="1421892"/>
+            <a:ext cx="2636520" cy="763006"/>
           </a:xfrm>
           <a:prstGeom prst="rect">
             <a:avLst/>
@@ -1004,9 +1004,9 @@
               <a:buNone/>
             </a:pPr>
             <a:r>
-              <a:rPr lang="en-US" sz="2200" b="1" dirty="0">
+              <a:rPr lang="en-US" sz="2000" b="1" dirty="0">
                 <a:solidFill>
-                  <a:srgbClr val="2C3E50"/>
+                  <a:srgbClr val="C45C26"/>
                 </a:solidFill>
                 <a:latin typeface="Microsoft YaHei" pitchFamily="34" charset="0"/>
                 <a:ea typeface="Microsoft YaHei" pitchFamily="34" charset="-122"/>
@@ -1014,7 +1014,7 @@
               </a:rPr>
               <a:t>日均急诊 860人</a:t>
             </a:r>
-            <a:endParaRPr lang="en-US" sz="2200" dirty="0"/>
+            <a:endParaRPr lang="en-US" sz="2000" dirty="0"/>
           </a:p>
         </p:txBody>
       </p:sp>
@@ -1026,8 +1026,8 @@
         </p:nvSpPr>
         <p:spPr>
           <a:xfrm>
-            <a:off x="3299460" y="1492758"/>
-            <a:ext cx="2545080" cy="721195"/>
+            <a:off x="3253740" y="1421892"/>
+            <a:ext cx="2636520" cy="763006"/>
           </a:xfrm>
           <a:prstGeom prst="rect">
             <a:avLst/>
@@ -1043,9 +1043,9 @@
               <a:buNone/>
             </a:pPr>
             <a:r>
-              <a:rPr lang="en-US" sz="2200" b="1" dirty="0">
+              <a:rPr lang="en-US" sz="2000" b="1" dirty="0">
                 <a:solidFill>
-                  <a:srgbClr val="2C3E50"/>
+                  <a:srgbClr val="C45C26"/>
                 </a:solidFill>
                 <a:latin typeface="Microsoft YaHei" pitchFamily="34" charset="0"/>
                 <a:ea typeface="Microsoft YaHei" pitchFamily="34" charset="-122"/>
@@ -1053,7 +1053,7 @@
               </a:rPr>
               <a:t>平均候诊 42分钟</a:t>
             </a:r>
-            <a:endParaRPr lang="en-US" sz="2200" dirty="0"/>
+            <a:endParaRPr lang="en-US" sz="2000" dirty="0"/>
           </a:p>
         </p:txBody>
       </p:sp>
@@ -1065,8 +1065,8 @@
         </p:nvSpPr>
         <p:spPr>
           <a:xfrm>
-            <a:off x="5958840" y="1492758"/>
-            <a:ext cx="2545080" cy="721195"/>
+            <a:off x="6004560" y="1421892"/>
+            <a:ext cx="2636520" cy="763006"/>
           </a:xfrm>
           <a:prstGeom prst="rect">
             <a:avLst/>
@@ -1082,9 +1082,9 @@
               <a:buNone/>
             </a:pPr>
             <a:r>
-              <a:rPr lang="en-US" sz="2200" b="1" dirty="0">
+              <a:rPr lang="en-US" sz="2000" b="1" dirty="0">
                 <a:solidFill>
-                  <a:srgbClr val="2C3E50"/>
+                  <a:srgbClr val="C45C26"/>
                 </a:solidFill>
                 <a:latin typeface="Microsoft YaHei" pitchFamily="34" charset="0"/>
                 <a:ea typeface="Microsoft YaHei" pitchFamily="34" charset="-122"/>
@@ -1092,7 +1092,7 @@
               </a:rPr>
               <a:t>床位周转 1.8次</a:t>
             </a:r>
-            <a:endParaRPr lang="en-US" sz="2200" dirty="0"/>
+            <a:endParaRPr lang="en-US" sz="2000" dirty="0"/>
           </a:p>
         </p:txBody>
       </p:sp>
@@ -1104,8 +1104,8 @@
         </p:nvSpPr>
         <p:spPr>
           <a:xfrm>
-            <a:off x="640080" y="2328253"/>
-            <a:ext cx="2545080" cy="721195"/>
+            <a:off x="502920" y="2299198"/>
+            <a:ext cx="2636520" cy="763006"/>
           </a:xfrm>
           <a:prstGeom prst="rect">
             <a:avLst/>
@@ -1121,9 +1121,9 @@
               <a:buNone/>
             </a:pPr>
             <a:r>
-              <a:rPr lang="en-US" sz="2200" b="1" dirty="0">
+              <a:rPr lang="en-US" sz="2000" b="1" dirty="0">
                 <a:solidFill>
-                  <a:srgbClr val="2C3E50"/>
+                  <a:srgbClr val="C45C26"/>
                 </a:solidFill>
                 <a:latin typeface="Microsoft YaHei" pitchFamily="34" charset="0"/>
                 <a:ea typeface="Microsoft YaHei" pitchFamily="34" charset="-122"/>
@@ -1131,7 +1131,7 @@
               </a:rPr>
               <a:t>抢救成功率 96%</a:t>
             </a:r>
-            <a:endParaRPr lang="en-US" sz="2200" dirty="0"/>
+            <a:endParaRPr lang="en-US" sz="2000" dirty="0"/>
           </a:p>
         </p:txBody>
       </p:sp>
@@ -1143,8 +1143,8 @@
         </p:nvSpPr>
         <p:spPr>
           <a:xfrm>
-            <a:off x="3299460" y="2328253"/>
-            <a:ext cx="2545080" cy="721195"/>
+            <a:off x="3253740" y="2299198"/>
+            <a:ext cx="2636520" cy="763006"/>
           </a:xfrm>
           <a:prstGeom prst="rect">
             <a:avLst/>
@@ -1160,9 +1160,9 @@
               <a:buNone/>
             </a:pPr>
             <a:r>
-              <a:rPr lang="en-US" sz="2200" b="1" dirty="0">
+              <a:rPr lang="en-US" sz="2000" b="1" dirty="0">
                 <a:solidFill>
-                  <a:srgbClr val="2C3E50"/>
+                  <a:srgbClr val="C45C26"/>
                 </a:solidFill>
                 <a:latin typeface="Microsoft YaHei" pitchFamily="34" charset="0"/>
                 <a:ea typeface="Microsoft YaHei" pitchFamily="34" charset="-122"/>
@@ -1170,7 +1170,7 @@
               </a:rPr>
               <a:t>满意度 78%</a:t>
             </a:r>
-            <a:endParaRPr lang="en-US" sz="2200" dirty="0"/>
+            <a:endParaRPr lang="en-US" sz="2000" dirty="0"/>
           </a:p>
         </p:txBody>
       </p:sp>
@@ -1182,18 +1182,18 @@
         </p:nvSpPr>
         <p:spPr>
           <a:xfrm>
-            <a:off x="640080" y="3163748"/>
-            <a:ext cx="7863840" cy="954100"/>
+            <a:off x="502920" y="3176504"/>
+            <a:ext cx="8138160" cy="1005352"/>
           </a:xfrm>
           <a:prstGeom prst="rect">
             <a:avLst/>
           </a:prstGeom>
           <a:solidFill>
-            <a:srgbClr val="FFFFFF"/>
+            <a:srgbClr val="F3F7FA"/>
           </a:solidFill>
           <a:ln w="12700">
             <a:solidFill>
-              <a:srgbClr val="D9D5CF"/>
+              <a:srgbClr val="B7C5D1"/>
             </a:solidFill>
             <a:prstDash val="solid"/>
           </a:ln>
@@ -1207,8 +1207,8 @@
         </p:nvSpPr>
         <p:spPr>
           <a:xfrm>
-            <a:off x="640080" y="3503638"/>
-            <a:ext cx="7863840" cy="274320"/>
+            <a:off x="502920" y="3542020"/>
+            <a:ext cx="8138160" cy="274320"/>
           </a:xfrm>
           <a:prstGeom prst="rect">
             <a:avLst/>
@@ -1226,7 +1226,7 @@
             <a:r>
               <a:rPr lang="en-US" sz="1200" dirty="0">
                 <a:solidFill>
-                  <a:srgbClr val="777777"/>
+                  <a:srgbClr val="6A7D8C"/>
                 </a:solidFill>
               </a:rPr>
               <a:t>图表占位</a:t>
@@ -1243,8 +1243,8 @@
         </p:nvSpPr>
         <p:spPr>
           <a:xfrm>
-            <a:off x="640080" y="4530852"/>
-            <a:ext cx="5504688" cy="201168"/>
+            <a:off x="502920" y="4594860"/>
+            <a:ext cx="5696712" cy="201168"/>
           </a:xfrm>
           <a:prstGeom prst="rect">
             <a:avLst/>
@@ -1262,7 +1262,7 @@
             <a:r>
               <a:rPr lang="en-US" sz="800" dirty="0">
                 <a:solidFill>
-                  <a:srgbClr val="777777"/>
+                  <a:srgbClr val="6A7D8C"/>
                 </a:solidFill>
                 <a:latin typeface="Microsoft YaHei" pitchFamily="34" charset="0"/>
                 <a:ea typeface="Microsoft YaHei" pitchFamily="34" charset="-122"/>
